--- a/week-13-interactive_dashboards_and_storytelling/week-13-slides.pptx
+++ b/week-13-interactive_dashboards_and_storytelling/week-13-slides.pptx
@@ -26,8 +26,7 @@
     <p:sldId id="275" r:id="rId20"/>
     <p:sldId id="276" r:id="rId21"/>
     <p:sldId id="277" r:id="rId22"/>
-    <p:sldId id="278" r:id="rId23"/>
-    <p:sldId id="279" r:id="rId24"/>
+    <p:sldId id="279" r:id="rId23"/>
   </p:sldIdLst>
   <p:sldSz cx="12192000" cy="6858000"/>
   <p:notesSz cx="6858000" cy="9144000"/>
@@ -19369,14 +19368,14 @@
           <p:nvPr>
             <p:extLst>
               <p:ext uri="{D42A27DB-BD31-4B8C-83A1-F6EECF244321}">
-                <p14:modId xmlns:p14="http://schemas.microsoft.com/office/powerpoint/2010/main" val="3426006283"/>
+                <p14:modId xmlns:p14="http://schemas.microsoft.com/office/powerpoint/2010/main" val="3808381146"/>
               </p:ext>
             </p:extLst>
           </p:nvPr>
         </p:nvGraphicFramePr>
         <p:xfrm>
           <a:off x="777240" y="1828800"/>
-          <a:ext cx="10607040" cy="4114800"/>
+          <a:ext cx="10972801" cy="4053840"/>
         </p:xfrm>
         <a:graphic>
           <a:graphicData uri="http://schemas.openxmlformats.org/drawingml/2006/table">
@@ -19385,21 +19384,21 @@
                 <a:tableStyleId>{5C22544A-7EE6-4342-B048-85BDC9FD1C3A}</a:tableStyleId>
               </a:tblPr>
               <a:tblGrid>
-                <a:gridCol w="3108960">
+                <a:gridCol w="3216166">
                   <a:extLst>
                     <a:ext uri="{9D8B030D-6E8A-4147-A177-3AD203B41FA5}">
                       <a16:colId xmlns:a16="http://schemas.microsoft.com/office/drawing/2014/main" val="20000"/>
                     </a:ext>
                   </a:extLst>
                 </a:gridCol>
-                <a:gridCol w="3108960">
+                <a:gridCol w="3216166">
                   <a:extLst>
                     <a:ext uri="{9D8B030D-6E8A-4147-A177-3AD203B41FA5}">
                       <a16:colId xmlns:a16="http://schemas.microsoft.com/office/drawing/2014/main" val="20001"/>
                     </a:ext>
                   </a:extLst>
                 </a:gridCol>
-                <a:gridCol w="4389120">
+                <a:gridCol w="4540469">
                   <a:extLst>
                     <a:ext uri="{9D8B030D-6E8A-4147-A177-3AD203B41FA5}">
                       <a16:colId xmlns:a16="http://schemas.microsoft.com/office/drawing/2014/main" val="20002"/>
@@ -19692,13 +19691,31 @@
                     <a:lstStyle/>
                     <a:p>
                       <a:r>
-                        <a:rPr sz="2000">
+                        <a:rPr sz="2000" dirty="0">
                           <a:solidFill>
                             <a:srgbClr val="1A1A2E"/>
                           </a:solidFill>
                           <a:latin typeface="Microsoft JhengHei"/>
                         </a:rPr>
-                        <a:t>「少子化骨牌效應起點」</a:t>
+                        <a:t>「</a:t>
+                      </a:r>
+                      <a:r>
+                        <a:rPr sz="2000" dirty="0" err="1">
+                          <a:solidFill>
+                            <a:srgbClr val="1A1A2E"/>
+                          </a:solidFill>
+                          <a:latin typeface="Microsoft JhengHei"/>
+                        </a:rPr>
+                        <a:t>少子化骨牌效應起點</a:t>
+                      </a:r>
+                      <a:r>
+                        <a:rPr sz="2000" dirty="0">
+                          <a:solidFill>
+                            <a:srgbClr val="1A1A2E"/>
+                          </a:solidFill>
+                          <a:latin typeface="Microsoft JhengHei"/>
+                        </a:rPr>
+                        <a:t>」</a:t>
                       </a:r>
                     </a:p>
                   </a:txBody>
@@ -20745,763 +20762,6 @@
 </file>
 
 <file path=ppt/slides/slide22.xml><?xml version="1.0" encoding="utf-8"?>
-<p:sld xmlns:a="http://schemas.openxmlformats.org/drawingml/2006/main" xmlns:r="http://schemas.openxmlformats.org/officeDocument/2006/relationships" xmlns:p="http://schemas.openxmlformats.org/presentationml/2006/main">
-  <p:cSld>
-    <p:spTree>
-      <p:nvGrpSpPr>
-        <p:cNvPr id="1" name=""/>
-        <p:cNvGrpSpPr/>
-        <p:nvPr/>
-      </p:nvGrpSpPr>
-      <p:grpSpPr>
-        <a:xfrm>
-          <a:off x="0" y="0"/>
-          <a:ext cx="0" cy="0"/>
-          <a:chOff x="0" y="0"/>
-          <a:chExt cx="0" cy="0"/>
-        </a:xfrm>
-      </p:grpSpPr>
-      <p:sp>
-        <p:nvSpPr>
-          <p:cNvPr id="2" name="Rectangle 1"/>
-          <p:cNvSpPr/>
-          <p:nvPr/>
-        </p:nvSpPr>
-        <p:spPr>
-          <a:xfrm>
-            <a:off x="0" y="0"/>
-            <a:ext cx="12191695" cy="6858000"/>
-          </a:xfrm>
-          <a:prstGeom prst="rect">
-            <a:avLst/>
-          </a:prstGeom>
-          <a:solidFill>
-            <a:srgbClr val="FFFFFF"/>
-          </a:solidFill>
-          <a:ln>
-            <a:noFill/>
-          </a:ln>
-        </p:spPr>
-        <p:style>
-          <a:lnRef idx="1">
-            <a:schemeClr val="accent1"/>
-          </a:lnRef>
-          <a:fillRef idx="3">
-            <a:schemeClr val="accent1"/>
-          </a:fillRef>
-          <a:effectRef idx="2">
-            <a:schemeClr val="accent1"/>
-          </a:effectRef>
-          <a:fontRef idx="minor">
-            <a:schemeClr val="lt1"/>
-          </a:fontRef>
-        </p:style>
-        <p:txBody>
-          <a:bodyPr rtlCol="0" anchor="ctr"/>
-          <a:lstStyle/>
-          <a:p>
-            <a:pPr algn="ctr"/>
-            <a:endParaRPr/>
-          </a:p>
-        </p:txBody>
-      </p:sp>
-      <p:sp>
-        <p:nvSpPr>
-          <p:cNvPr id="3" name="Rectangle 2"/>
-          <p:cNvSpPr/>
-          <p:nvPr/>
-        </p:nvSpPr>
-        <p:spPr>
-          <a:xfrm>
-            <a:off x="0" y="0"/>
-            <a:ext cx="12191695" cy="128016"/>
-          </a:xfrm>
-          <a:prstGeom prst="rect">
-            <a:avLst/>
-          </a:prstGeom>
-          <a:solidFill>
-            <a:srgbClr val="0D9B9B"/>
-          </a:solidFill>
-          <a:ln>
-            <a:noFill/>
-          </a:ln>
-        </p:spPr>
-        <p:style>
-          <a:lnRef idx="1">
-            <a:schemeClr val="accent1"/>
-          </a:lnRef>
-          <a:fillRef idx="3">
-            <a:schemeClr val="accent1"/>
-          </a:fillRef>
-          <a:effectRef idx="2">
-            <a:schemeClr val="accent1"/>
-          </a:effectRef>
-          <a:fontRef idx="minor">
-            <a:schemeClr val="lt1"/>
-          </a:fontRef>
-        </p:style>
-        <p:txBody>
-          <a:bodyPr rtlCol="0" anchor="ctr"/>
-          <a:lstStyle/>
-          <a:p>
-            <a:pPr algn="ctr"/>
-            <a:endParaRPr/>
-          </a:p>
-        </p:txBody>
-      </p:sp>
-      <p:sp>
-        <p:nvSpPr>
-          <p:cNvPr id="4" name="TextBox 3"/>
-          <p:cNvSpPr txBox="1"/>
-          <p:nvPr/>
-        </p:nvSpPr>
-        <p:spPr>
-          <a:xfrm>
-            <a:off x="640080" y="502920"/>
-            <a:ext cx="10058400" cy="320040"/>
-          </a:xfrm>
-          <a:prstGeom prst="rect">
-            <a:avLst/>
-          </a:prstGeom>
-          <a:noFill/>
-        </p:spPr>
-        <p:txBody>
-          <a:bodyPr wrap="square" lIns="0" tIns="0" rIns="0" bIns="0" anchor="t">
-            <a:spAutoFit/>
-          </a:bodyPr>
-          <a:lstStyle/>
-          <a:p>
-            <a:pPr algn="l"/>
-            <a:r>
-              <a:rPr sz="1400" b="1" i="0">
-                <a:solidFill>
-                  <a:srgbClr val="0D9B9B"/>
-                </a:solidFill>
-                <a:latin typeface="Calibri"/>
-              </a:rPr>
-              <a:t>HOMEWORK · 下週上課前繳交</a:t>
-            </a:r>
-          </a:p>
-        </p:txBody>
-      </p:sp>
-      <p:sp>
-        <p:nvSpPr>
-          <p:cNvPr id="5" name="TextBox 4"/>
-          <p:cNvSpPr txBox="1"/>
-          <p:nvPr/>
-        </p:nvSpPr>
-        <p:spPr>
-          <a:xfrm>
-            <a:off x="640080" y="868680"/>
-            <a:ext cx="10972800" cy="777240"/>
-          </a:xfrm>
-          <a:prstGeom prst="rect">
-            <a:avLst/>
-          </a:prstGeom>
-          <a:noFill/>
-        </p:spPr>
-        <p:txBody>
-          <a:bodyPr wrap="square" lIns="0" tIns="0" rIns="0" bIns="0" anchor="t">
-            <a:spAutoFit/>
-          </a:bodyPr>
-          <a:lstStyle/>
-          <a:p>
-            <a:pPr algn="l"/>
-            <a:r>
-              <a:rPr sz="3200" b="1" i="0">
-                <a:solidFill>
-                  <a:srgbClr val="1A1A2E"/>
-                </a:solidFill>
-                <a:latin typeface="Microsoft JhengHei"/>
-              </a:rPr>
-              <a:t>把兩個資料集整合進你的儀表板</a:t>
-            </a:r>
-          </a:p>
-        </p:txBody>
-      </p:sp>
-      <p:sp>
-        <p:nvSpPr>
-          <p:cNvPr id="6" name="TextBox 5"/>
-          <p:cNvSpPr txBox="1"/>
-          <p:nvPr/>
-        </p:nvSpPr>
-        <p:spPr>
-          <a:xfrm>
-            <a:off x="822960" y="1783080"/>
-            <a:ext cx="10515600" cy="2377440"/>
-          </a:xfrm>
-          <a:prstGeom prst="rect">
-            <a:avLst/>
-          </a:prstGeom>
-          <a:noFill/>
-        </p:spPr>
-        <p:txBody>
-          <a:bodyPr wrap="square" lIns="0" tIns="0" rIns="0" bIns="0">
-            <a:spAutoFit/>
-          </a:bodyPr>
-          <a:lstStyle/>
-          <a:p>
-            <a:pPr algn="l">
-              <a:lnSpc>
-                <a:spcPct val="125000"/>
-              </a:lnSpc>
-            </a:pPr>
-            <a:r>
-              <a:rPr sz="1500" b="1">
-                <a:solidFill>
-                  <a:srgbClr val="0D9B9B"/>
-                </a:solidFill>
-                <a:latin typeface="Calibri"/>
-              </a:rPr>
-              <a:t>▸  </a:t>
-            </a:r>
-            <a:r>
-              <a:rPr sz="1500">
-                <a:solidFill>
-                  <a:srgbClr val="1A1A2E"/>
-                </a:solidFill>
-                <a:latin typeface="Microsoft JhengHei"/>
-              </a:rPr>
-              <a:t>新增 PsyArXiv 頁面：fetch_psyarxiv() + clean()，至少 2 張 Plotly 圖</a:t>
-            </a:r>
-          </a:p>
-          <a:p>
-            <a:pPr algn="l">
-              <a:lnSpc>
-                <a:spcPct val="125000"/>
-              </a:lnSpc>
-              <a:spcBef>
-                <a:spcPts val="675"/>
-              </a:spcBef>
-            </a:pPr>
-            <a:r>
-              <a:rPr sz="1500" b="1">
-                <a:solidFill>
-                  <a:srgbClr val="0D9B9B"/>
-                </a:solidFill>
-                <a:latin typeface="Calibri"/>
-              </a:rPr>
-              <a:t>▸  </a:t>
-            </a:r>
-            <a:r>
-              <a:rPr sz="1500">
-                <a:solidFill>
-                  <a:srgbClr val="1A1A2E"/>
-                </a:solidFill>
-                <a:latin typeface="Microsoft JhengHei"/>
-              </a:rPr>
-              <a:t>新增 MOE 頁面：fetch_all() + clean()，至少 2 張 Plotly 圖</a:t>
-            </a:r>
-          </a:p>
-          <a:p>
-            <a:pPr algn="l">
-              <a:lnSpc>
-                <a:spcPct val="125000"/>
-              </a:lnSpc>
-              <a:spcBef>
-                <a:spcPts val="675"/>
-              </a:spcBef>
-            </a:pPr>
-            <a:r>
-              <a:rPr sz="1500" b="1">
-                <a:solidFill>
-                  <a:srgbClr val="0D9B9B"/>
-                </a:solidFill>
-                <a:latin typeface="Calibri"/>
-              </a:rPr>
-              <a:t>▸  </a:t>
-            </a:r>
-            <a:r>
-              <a:rPr sz="1500">
-                <a:solidFill>
-                  <a:srgbClr val="1A1A2E"/>
-                </a:solidFill>
-                <a:latin typeface="Microsoft JhengHei"/>
-              </a:rPr>
-              <a:t>至少一張圖要含 annotation；每張圖下方寫 1–2 句 takeaway</a:t>
-            </a:r>
-          </a:p>
-          <a:p>
-            <a:pPr algn="l">
-              <a:lnSpc>
-                <a:spcPct val="125000"/>
-              </a:lnSpc>
-              <a:spcBef>
-                <a:spcPts val="675"/>
-              </a:spcBef>
-            </a:pPr>
-            <a:r>
-              <a:rPr sz="1500" b="1">
-                <a:solidFill>
-                  <a:srgbClr val="0D9B9B"/>
-                </a:solidFill>
-                <a:latin typeface="Calibri"/>
-              </a:rPr>
-              <a:t>▸  </a:t>
-            </a:r>
-            <a:r>
-              <a:rPr sz="1500">
-                <a:solidFill>
-                  <a:srgbClr val="1A1A2E"/>
-                </a:solidFill>
-                <a:latin typeface="Microsoft JhengHei"/>
-              </a:rPr>
-              <a:t>每個資料集至少一個 widget（slider / selectbox / multiselect）</a:t>
-            </a:r>
-          </a:p>
-          <a:p>
-            <a:pPr algn="l">
-              <a:lnSpc>
-                <a:spcPct val="125000"/>
-              </a:lnSpc>
-              <a:spcBef>
-                <a:spcPts val="675"/>
-              </a:spcBef>
-            </a:pPr>
-            <a:r>
-              <a:rPr sz="1500" b="1">
-                <a:solidFill>
-                  <a:srgbClr val="0D9B9B"/>
-                </a:solidFill>
-                <a:latin typeface="Calibri"/>
-              </a:rPr>
-              <a:t>▸  </a:t>
-            </a:r>
-            <a:r>
-              <a:rPr sz="1500">
-                <a:solidFill>
-                  <a:srgbClr val="1A1A2E"/>
-                </a:solidFill>
-                <a:latin typeface="Microsoft JhengHei"/>
-              </a:rPr>
-              <a:t>Docstring 寫一段：哪個清理決定你刻意與範例不同？理由？</a:t>
-            </a:r>
-          </a:p>
-        </p:txBody>
-      </p:sp>
-      <p:graphicFrame>
-        <p:nvGraphicFramePr>
-          <p:cNvPr id="7" name="Table 6"/>
-          <p:cNvGraphicFramePr>
-            <a:graphicFrameLocks noGrp="1"/>
-          </p:cNvGraphicFramePr>
-          <p:nvPr/>
-        </p:nvGraphicFramePr>
-        <p:xfrm>
-          <a:off x="822960" y="4389120"/>
-          <a:ext cx="10515600" cy="1828800"/>
-        </p:xfrm>
-        <a:graphic>
-          <a:graphicData uri="http://schemas.openxmlformats.org/drawingml/2006/table">
-            <a:tbl>
-              <a:tblPr firstRow="1" bandRow="1">
-                <a:tableStyleId>{5C22544A-7EE6-4342-B048-85BDC9FD1C3A}</a:tableStyleId>
-              </a:tblPr>
-              <a:tblGrid>
-                <a:gridCol w="8229600">
-                  <a:extLst>
-                    <a:ext uri="{9D8B030D-6E8A-4147-A177-3AD203B41FA5}">
-                      <a16:colId xmlns:a16="http://schemas.microsoft.com/office/drawing/2014/main" val="20000"/>
-                    </a:ext>
-                  </a:extLst>
-                </a:gridCol>
-                <a:gridCol w="2286000">
-                  <a:extLst>
-                    <a:ext uri="{9D8B030D-6E8A-4147-A177-3AD203B41FA5}">
-                      <a16:colId xmlns:a16="http://schemas.microsoft.com/office/drawing/2014/main" val="20001"/>
-                    </a:ext>
-                  </a:extLst>
-                </a:gridCol>
-              </a:tblGrid>
-              <a:tr h="304800">
-                <a:tc>
-                  <a:txBody>
-                    <a:bodyPr/>
-                    <a:lstStyle/>
-                    <a:p>
-                      <a:r>
-                        <a:rPr sz="1300" b="1">
-                          <a:solidFill>
-                            <a:srgbClr val="FFFFFF"/>
-                          </a:solidFill>
-                          <a:latin typeface="Microsoft JhengHei"/>
-                        </a:rPr>
-                        <a:t>評分項目</a:t>
-                      </a:r>
-                    </a:p>
-                  </a:txBody>
-                  <a:tcPr>
-                    <a:solidFill>
-                      <a:srgbClr val="14325C"/>
-                    </a:solidFill>
-                  </a:tcPr>
-                </a:tc>
-                <a:tc>
-                  <a:txBody>
-                    <a:bodyPr/>
-                    <a:lstStyle/>
-                    <a:p>
-                      <a:r>
-                        <a:rPr sz="1300" b="1">
-                          <a:solidFill>
-                            <a:srgbClr val="FFFFFF"/>
-                          </a:solidFill>
-                          <a:latin typeface="Microsoft JhengHei"/>
-                        </a:rPr>
-                        <a:t>比重</a:t>
-                      </a:r>
-                    </a:p>
-                  </a:txBody>
-                  <a:tcPr>
-                    <a:solidFill>
-                      <a:srgbClr val="14325C"/>
-                    </a:solidFill>
-                  </a:tcPr>
-                </a:tc>
-                <a:extLst>
-                  <a:ext uri="{0D108BD9-81ED-4DB2-BD59-A6C34878D82A}">
-                    <a16:rowId xmlns:a16="http://schemas.microsoft.com/office/drawing/2014/main" val="10000"/>
-                  </a:ext>
-                </a:extLst>
-              </a:tr>
-              <a:tr h="304800">
-                <a:tc>
-                  <a:txBody>
-                    <a:bodyPr/>
-                    <a:lstStyle/>
-                    <a:p>
-                      <a:r>
-                        <a:rPr sz="1200">
-                          <a:solidFill>
-                            <a:srgbClr val="1A1A2E"/>
-                          </a:solidFill>
-                          <a:latin typeface="Microsoft JhengHei"/>
-                        </a:rPr>
-                        <a:t>Pipeline 完整 (load → clean → describe → plot)</a:t>
-                      </a:r>
-                    </a:p>
-                  </a:txBody>
-                  <a:tcPr>
-                    <a:solidFill>
-                      <a:srgbClr val="FFFFFF"/>
-                    </a:solidFill>
-                  </a:tcPr>
-                </a:tc>
-                <a:tc>
-                  <a:txBody>
-                    <a:bodyPr/>
-                    <a:lstStyle/>
-                    <a:p>
-                      <a:r>
-                        <a:rPr sz="1200">
-                          <a:solidFill>
-                            <a:srgbClr val="1A1A2E"/>
-                          </a:solidFill>
-                          <a:latin typeface="Microsoft JhengHei"/>
-                        </a:rPr>
-                        <a:t>30%</a:t>
-                      </a:r>
-                    </a:p>
-                  </a:txBody>
-                  <a:tcPr>
-                    <a:solidFill>
-                      <a:srgbClr val="FFFFFF"/>
-                    </a:solidFill>
-                  </a:tcPr>
-                </a:tc>
-                <a:extLst>
-                  <a:ext uri="{0D108BD9-81ED-4DB2-BD59-A6C34878D82A}">
-                    <a16:rowId xmlns:a16="http://schemas.microsoft.com/office/drawing/2014/main" val="10001"/>
-                  </a:ext>
-                </a:extLst>
-              </a:tr>
-              <a:tr h="304800">
-                <a:tc>
-                  <a:txBody>
-                    <a:bodyPr/>
-                    <a:lstStyle/>
-                    <a:p>
-                      <a:r>
-                        <a:rPr sz="1200">
-                          <a:solidFill>
-                            <a:srgbClr val="1A1A2E"/>
-                          </a:solidFill>
-                          <a:latin typeface="Microsoft JhengHei"/>
-                        </a:rPr>
-                        <a:t>Plotly 圖數量與多樣性 (≥ 4 張，含 annotation)</a:t>
-                      </a:r>
-                    </a:p>
-                  </a:txBody>
-                  <a:tcPr>
-                    <a:solidFill>
-                      <a:srgbClr val="F7F8FA"/>
-                    </a:solidFill>
-                  </a:tcPr>
-                </a:tc>
-                <a:tc>
-                  <a:txBody>
-                    <a:bodyPr/>
-                    <a:lstStyle/>
-                    <a:p>
-                      <a:r>
-                        <a:rPr sz="1200">
-                          <a:solidFill>
-                            <a:srgbClr val="1A1A2E"/>
-                          </a:solidFill>
-                          <a:latin typeface="Microsoft JhengHei"/>
-                        </a:rPr>
-                        <a:t>25%</a:t>
-                      </a:r>
-                    </a:p>
-                  </a:txBody>
-                  <a:tcPr>
-                    <a:solidFill>
-                      <a:srgbClr val="F7F8FA"/>
-                    </a:solidFill>
-                  </a:tcPr>
-                </a:tc>
-                <a:extLst>
-                  <a:ext uri="{0D108BD9-81ED-4DB2-BD59-A6C34878D82A}">
-                    <a16:rowId xmlns:a16="http://schemas.microsoft.com/office/drawing/2014/main" val="10002"/>
-                  </a:ext>
-                </a:extLst>
-              </a:tr>
-              <a:tr h="304800">
-                <a:tc>
-                  <a:txBody>
-                    <a:bodyPr/>
-                    <a:lstStyle/>
-                    <a:p>
-                      <a:r>
-                        <a:rPr sz="1200">
-                          <a:solidFill>
-                            <a:srgbClr val="1A1A2E"/>
-                          </a:solidFill>
-                          <a:latin typeface="Microsoft JhengHei"/>
-                        </a:rPr>
-                        <a:t>資料敘事 — caption + annotation</a:t>
-                      </a:r>
-                    </a:p>
-                  </a:txBody>
-                  <a:tcPr>
-                    <a:solidFill>
-                      <a:srgbClr val="FFFFFF"/>
-                    </a:solidFill>
-                  </a:tcPr>
-                </a:tc>
-                <a:tc>
-                  <a:txBody>
-                    <a:bodyPr/>
-                    <a:lstStyle/>
-                    <a:p>
-                      <a:r>
-                        <a:rPr sz="1200">
-                          <a:solidFill>
-                            <a:srgbClr val="1A1A2E"/>
-                          </a:solidFill>
-                          <a:latin typeface="Microsoft JhengHei"/>
-                        </a:rPr>
-                        <a:t>20%</a:t>
-                      </a:r>
-                    </a:p>
-                  </a:txBody>
-                  <a:tcPr>
-                    <a:solidFill>
-                      <a:srgbClr val="FFFFFF"/>
-                    </a:solidFill>
-                  </a:tcPr>
-                </a:tc>
-                <a:extLst>
-                  <a:ext uri="{0D108BD9-81ED-4DB2-BD59-A6C34878D82A}">
-                    <a16:rowId xmlns:a16="http://schemas.microsoft.com/office/drawing/2014/main" val="10003"/>
-                  </a:ext>
-                </a:extLst>
-              </a:tr>
-              <a:tr h="304800">
-                <a:tc>
-                  <a:txBody>
-                    <a:bodyPr/>
-                    <a:lstStyle/>
-                    <a:p>
-                      <a:r>
-                        <a:rPr sz="1200">
-                          <a:solidFill>
-                            <a:srgbClr val="1A1A2E"/>
-                          </a:solidFill>
-                          <a:latin typeface="Microsoft JhengHei"/>
-                        </a:rPr>
-                        <a:t>清理決定的反思（與範例不同 + 理由）</a:t>
-                      </a:r>
-                    </a:p>
-                  </a:txBody>
-                  <a:tcPr>
-                    <a:solidFill>
-                      <a:srgbClr val="F7F8FA"/>
-                    </a:solidFill>
-                  </a:tcPr>
-                </a:tc>
-                <a:tc>
-                  <a:txBody>
-                    <a:bodyPr/>
-                    <a:lstStyle/>
-                    <a:p>
-                      <a:r>
-                        <a:rPr sz="1200">
-                          <a:solidFill>
-                            <a:srgbClr val="1A1A2E"/>
-                          </a:solidFill>
-                          <a:latin typeface="Microsoft JhengHei"/>
-                        </a:rPr>
-                        <a:t>15%</a:t>
-                      </a:r>
-                    </a:p>
-                  </a:txBody>
-                  <a:tcPr>
-                    <a:solidFill>
-                      <a:srgbClr val="F7F8FA"/>
-                    </a:solidFill>
-                  </a:tcPr>
-                </a:tc>
-                <a:extLst>
-                  <a:ext uri="{0D108BD9-81ED-4DB2-BD59-A6C34878D82A}">
-                    <a16:rowId xmlns:a16="http://schemas.microsoft.com/office/drawing/2014/main" val="10004"/>
-                  </a:ext>
-                </a:extLst>
-              </a:tr>
-              <a:tr h="304800">
-                <a:tc>
-                  <a:txBody>
-                    <a:bodyPr/>
-                    <a:lstStyle/>
-                    <a:p>
-                      <a:r>
-                        <a:rPr sz="1200">
-                          <a:solidFill>
-                            <a:srgbClr val="1A1A2E"/>
-                          </a:solidFill>
-                          <a:latin typeface="Microsoft JhengHei"/>
-                        </a:rPr>
-                        <a:t>Streamlit 互動 (widget + 排版)</a:t>
-                      </a:r>
-                    </a:p>
-                  </a:txBody>
-                  <a:tcPr>
-                    <a:solidFill>
-                      <a:srgbClr val="FFFFFF"/>
-                    </a:solidFill>
-                  </a:tcPr>
-                </a:tc>
-                <a:tc>
-                  <a:txBody>
-                    <a:bodyPr/>
-                    <a:lstStyle/>
-                    <a:p>
-                      <a:r>
-                        <a:rPr sz="1200">
-                          <a:solidFill>
-                            <a:srgbClr val="1A1A2E"/>
-                          </a:solidFill>
-                          <a:latin typeface="Microsoft JhengHei"/>
-                        </a:rPr>
-                        <a:t>10%</a:t>
-                      </a:r>
-                    </a:p>
-                  </a:txBody>
-                  <a:tcPr>
-                    <a:solidFill>
-                      <a:srgbClr val="FFFFFF"/>
-                    </a:solidFill>
-                  </a:tcPr>
-                </a:tc>
-                <a:extLst>
-                  <a:ext uri="{0D108BD9-81ED-4DB2-BD59-A6C34878D82A}">
-                    <a16:rowId xmlns:a16="http://schemas.microsoft.com/office/drawing/2014/main" val="10005"/>
-                  </a:ext>
-                </a:extLst>
-              </a:tr>
-            </a:tbl>
-          </a:graphicData>
-        </a:graphic>
-      </p:graphicFrame>
-      <p:sp>
-        <p:nvSpPr>
-          <p:cNvPr id="8" name="TextBox 7"/>
-          <p:cNvSpPr txBox="1"/>
-          <p:nvPr/>
-        </p:nvSpPr>
-        <p:spPr>
-          <a:xfrm>
-            <a:off x="457200" y="6446520"/>
-            <a:ext cx="8229600" cy="320040"/>
-          </a:xfrm>
-          <a:prstGeom prst="rect">
-            <a:avLst/>
-          </a:prstGeom>
-          <a:noFill/>
-        </p:spPr>
-        <p:txBody>
-          <a:bodyPr wrap="square" lIns="0" tIns="0" rIns="0" bIns="0" anchor="t">
-            <a:spAutoFit/>
-          </a:bodyPr>
-          <a:lstStyle/>
-          <a:p>
-            <a:pPr algn="l"/>
-            <a:r>
-              <a:rPr sz="1100" b="0" i="0">
-                <a:solidFill>
-                  <a:srgbClr val="5F6B83"/>
-                </a:solidFill>
-                <a:latin typeface="Calibri"/>
-              </a:rPr>
-              <a:t>Week 13 — Interactive Dashboards &amp; Data Storytelling  ·  ACL@NCU</a:t>
-            </a:r>
-          </a:p>
-        </p:txBody>
-      </p:sp>
-      <p:sp>
-        <p:nvSpPr>
-          <p:cNvPr id="9" name="TextBox 8"/>
-          <p:cNvSpPr txBox="1"/>
-          <p:nvPr/>
-        </p:nvSpPr>
-        <p:spPr>
-          <a:xfrm>
-            <a:off x="10332720" y="6446520"/>
-            <a:ext cx="1371600" cy="320040"/>
-          </a:xfrm>
-          <a:prstGeom prst="rect">
-            <a:avLst/>
-          </a:prstGeom>
-          <a:noFill/>
-        </p:spPr>
-        <p:txBody>
-          <a:bodyPr wrap="square" lIns="0" tIns="0" rIns="0" bIns="0" anchor="t">
-            <a:spAutoFit/>
-          </a:bodyPr>
-          <a:lstStyle/>
-          <a:p>
-            <a:pPr algn="r"/>
-            <a:r>
-              <a:rPr sz="1100" b="0" i="0">
-                <a:solidFill>
-                  <a:srgbClr val="5F6B83"/>
-                </a:solidFill>
-                <a:latin typeface="Calibri"/>
-              </a:rPr>
-              <a:t>23 / 24</a:t>
-            </a:r>
-          </a:p>
-        </p:txBody>
-      </p:sp>
-    </p:spTree>
-  </p:cSld>
-  <p:clrMapOvr>
-    <a:masterClrMapping/>
-  </p:clrMapOvr>
-</p:sld>
-</file>
-
-<file path=ppt/slides/slide23.xml><?xml version="1.0" encoding="utf-8"?>
 <p:sld xmlns:a="http://schemas.openxmlformats.org/drawingml/2006/main" xmlns:r="http://schemas.openxmlformats.org/officeDocument/2006/relationships" xmlns:p="http://schemas.openxmlformats.org/presentationml/2006/main">
   <p:cSld>
     <p:spTree>
